--- a/docs/poster/variants/v02.pptx
+++ b/docs/poster/variants/v02.pptx
@@ -4265,6 +4265,90 @@
               </a:spcAft>
             </a:pPr>
             <a:r>
+              <a:rPr sz="6200" b="1">
+                <a:solidFill>
+                  <a:srgbClr val="1C6FB5"/>
+                </a:solidFill>
+                <a:latin typeface="Georgia"/>
+              </a:rPr>
+              <a:t>14</a:t>
+            </a:r>
+          </a:p>
+        </p:txBody>
+      </p:sp>
+      <p:sp>
+        <p:nvSpPr>
+          <p:cNvPr id="30" name="TextBox 29"/>
+          <p:cNvSpPr txBox="1"/>
+          <p:nvPr/>
+        </p:nvSpPr>
+        <p:spPr>
+          <a:xfrm>
+            <a:off x="731520" y="11406377"/>
+            <a:ext cx="10607040" cy="365760"/>
+          </a:xfrm>
+          <a:prstGeom prst="rect">
+            <a:avLst/>
+          </a:prstGeom>
+          <a:noFill/>
+        </p:spPr>
+        <p:txBody>
+          <a:bodyPr wrap="square" lIns="0" rIns="0" tIns="0" bIns="0">
+            <a:spAutoFit/>
+          </a:bodyPr>
+          <a:lstStyle/>
+          <a:p>
+            <a:pPr algn="l">
+              <a:lnSpc>
+                <a:spcPct val="122000"/>
+              </a:lnSpc>
+              <a:spcAft>
+                <a:spcPts val="600"/>
+              </a:spcAft>
+            </a:pPr>
+            <a:r>
+              <a:rPr sz="1500" b="0">
+                <a:solidFill>
+                  <a:srgbClr val="6A6A6A"/>
+                </a:solidFill>
+                <a:latin typeface="Arial"/>
+              </a:rPr>
+              <a:t>analysis tools the planner can choose from</a:t>
+            </a:r>
+          </a:p>
+        </p:txBody>
+      </p:sp>
+      <p:sp>
+        <p:nvSpPr>
+          <p:cNvPr id="31" name="TextBox 30"/>
+          <p:cNvSpPr txBox="1"/>
+          <p:nvPr/>
+        </p:nvSpPr>
+        <p:spPr>
+          <a:xfrm>
+            <a:off x="731520" y="11861292"/>
+            <a:ext cx="10607040" cy="365760"/>
+          </a:xfrm>
+          <a:prstGeom prst="rect">
+            <a:avLst/>
+          </a:prstGeom>
+          <a:noFill/>
+        </p:spPr>
+        <p:txBody>
+          <a:bodyPr wrap="square" lIns="0" rIns="0" tIns="0" bIns="0">
+            <a:spAutoFit/>
+          </a:bodyPr>
+          <a:lstStyle/>
+          <a:p>
+            <a:pPr algn="l">
+              <a:lnSpc>
+                <a:spcPct val="95000"/>
+              </a:lnSpc>
+              <a:spcAft>
+                <a:spcPts val="0"/>
+              </a:spcAft>
+            </a:pPr>
+            <a:r>
               <a:rPr sz="3200" b="1">
                 <a:solidFill>
                   <a:srgbClr val="1A1A1A"/>
@@ -4278,13 +4362,13 @@
       </p:sp>
       <p:sp>
         <p:nvSpPr>
-          <p:cNvPr id="30" name="Rectangle 29"/>
+          <p:cNvPr id="32" name="Rectangle 31"/>
           <p:cNvSpPr/>
           <p:nvPr/>
         </p:nvSpPr>
         <p:spPr>
           <a:xfrm>
-            <a:off x="731520" y="11131549"/>
+            <a:off x="731520" y="12389611"/>
             <a:ext cx="10607040" cy="27432"/>
           </a:xfrm>
           <a:prstGeom prst="rect">
@@ -4322,13 +4406,13 @@
       </p:sp>
       <p:sp>
         <p:nvSpPr>
-          <p:cNvPr id="31" name="TextBox 30"/>
+          <p:cNvPr id="33" name="TextBox 32"/>
           <p:cNvSpPr txBox="1"/>
           <p:nvPr/>
         </p:nvSpPr>
         <p:spPr>
           <a:xfrm>
-            <a:off x="731520" y="11460733"/>
+            <a:off x="731520" y="12718795"/>
             <a:ext cx="10607040" cy="365760"/>
           </a:xfrm>
           <a:prstGeom prst="rect">
@@ -4364,13 +4448,13 @@
       </p:sp>
       <p:sp>
         <p:nvSpPr>
-          <p:cNvPr id="32" name="TextBox 31"/>
+          <p:cNvPr id="34" name="TextBox 33"/>
           <p:cNvSpPr txBox="1"/>
           <p:nvPr/>
         </p:nvSpPr>
         <p:spPr>
           <a:xfrm>
-            <a:off x="731520" y="13126973"/>
+            <a:off x="731520" y="14385035"/>
             <a:ext cx="10607040" cy="365760"/>
           </a:xfrm>
           <a:prstGeom prst="rect">
@@ -4393,6 +4477,90 @@
               </a:spcAft>
             </a:pPr>
             <a:r>
+              <a:rPr sz="6200" b="1">
+                <a:solidFill>
+                  <a:srgbClr val="1C6FB5"/>
+                </a:solidFill>
+                <a:latin typeface="Georgia"/>
+              </a:rPr>
+              <a:t>92</a:t>
+            </a:r>
+          </a:p>
+        </p:txBody>
+      </p:sp>
+      <p:sp>
+        <p:nvSpPr>
+          <p:cNvPr id="35" name="TextBox 34"/>
+          <p:cNvSpPr txBox="1"/>
+          <p:nvPr/>
+        </p:nvSpPr>
+        <p:spPr>
+          <a:xfrm>
+            <a:off x="731520" y="15188184"/>
+            <a:ext cx="10607040" cy="365760"/>
+          </a:xfrm>
+          <a:prstGeom prst="rect">
+            <a:avLst/>
+          </a:prstGeom>
+          <a:noFill/>
+        </p:spPr>
+        <p:txBody>
+          <a:bodyPr wrap="square" lIns="0" rIns="0" tIns="0" bIns="0">
+            <a:spAutoFit/>
+          </a:bodyPr>
+          <a:lstStyle/>
+          <a:p>
+            <a:pPr algn="l">
+              <a:lnSpc>
+                <a:spcPct val="122000"/>
+              </a:lnSpc>
+              <a:spcAft>
+                <a:spcPts val="600"/>
+              </a:spcAft>
+            </a:pPr>
+            <a:r>
+              <a:rPr sz="1500" b="0">
+                <a:solidFill>
+                  <a:srgbClr val="6A6A6A"/>
+                </a:solidFill>
+                <a:latin typeface="Arial"/>
+              </a:rPr>
+              <a:t>questions asked of a dataset so far</a:t>
+            </a:r>
+          </a:p>
+        </p:txBody>
+      </p:sp>
+      <p:sp>
+        <p:nvSpPr>
+          <p:cNvPr id="36" name="TextBox 35"/>
+          <p:cNvSpPr txBox="1"/>
+          <p:nvPr/>
+        </p:nvSpPr>
+        <p:spPr>
+          <a:xfrm>
+            <a:off x="731520" y="15643097"/>
+            <a:ext cx="10607040" cy="365760"/>
+          </a:xfrm>
+          <a:prstGeom prst="rect">
+            <a:avLst/>
+          </a:prstGeom>
+          <a:noFill/>
+        </p:spPr>
+        <p:txBody>
+          <a:bodyPr wrap="square" lIns="0" rIns="0" tIns="0" bIns="0">
+            <a:spAutoFit/>
+          </a:bodyPr>
+          <a:lstStyle/>
+          <a:p>
+            <a:pPr algn="l">
+              <a:lnSpc>
+                <a:spcPct val="95000"/>
+              </a:lnSpc>
+              <a:spcAft>
+                <a:spcPts val="0"/>
+              </a:spcAft>
+            </a:pPr>
+            <a:r>
               <a:rPr sz="3200" b="1">
                 <a:solidFill>
                   <a:srgbClr val="1A1A1A"/>
@@ -4406,13 +4574,13 @@
       </p:sp>
       <p:sp>
         <p:nvSpPr>
-          <p:cNvPr id="33" name="Rectangle 32"/>
+          <p:cNvPr id="37" name="Rectangle 36"/>
           <p:cNvSpPr/>
           <p:nvPr/>
         </p:nvSpPr>
         <p:spPr>
           <a:xfrm>
-            <a:off x="731520" y="13655293"/>
+            <a:off x="731520" y="16171418"/>
             <a:ext cx="10607040" cy="27432"/>
           </a:xfrm>
           <a:prstGeom prst="rect">
@@ -4450,13 +4618,13 @@
       </p:sp>
       <p:sp>
         <p:nvSpPr>
-          <p:cNvPr id="34" name="TextBox 33"/>
+          <p:cNvPr id="38" name="TextBox 37"/>
           <p:cNvSpPr txBox="1"/>
           <p:nvPr/>
         </p:nvSpPr>
         <p:spPr>
           <a:xfrm>
-            <a:off x="731520" y="13984477"/>
+            <a:off x="731520" y="16500602"/>
             <a:ext cx="10607040" cy="365760"/>
           </a:xfrm>
           <a:prstGeom prst="rect">
@@ -4492,13 +4660,13 @@
       </p:sp>
       <p:sp>
         <p:nvSpPr>
-          <p:cNvPr id="35" name="TextBox 34"/>
+          <p:cNvPr id="39" name="TextBox 38"/>
           <p:cNvSpPr txBox="1"/>
           <p:nvPr/>
         </p:nvSpPr>
         <p:spPr>
           <a:xfrm>
-            <a:off x="731520" y="15650717"/>
+            <a:off x="731520" y="18166842"/>
             <a:ext cx="10607040" cy="365760"/>
           </a:xfrm>
           <a:prstGeom prst="rect">
@@ -4534,13 +4702,13 @@
       </p:sp>
       <p:sp>
         <p:nvSpPr>
-          <p:cNvPr id="36" name="Rectangle 35"/>
+          <p:cNvPr id="40" name="Rectangle 39"/>
           <p:cNvSpPr/>
           <p:nvPr/>
         </p:nvSpPr>
         <p:spPr>
           <a:xfrm>
-            <a:off x="731520" y="16179037"/>
+            <a:off x="731520" y="18695162"/>
             <a:ext cx="10607040" cy="27432"/>
           </a:xfrm>
           <a:prstGeom prst="rect">
@@ -4578,13 +4746,13 @@
       </p:sp>
       <p:sp>
         <p:nvSpPr>
-          <p:cNvPr id="37" name="TextBox 36"/>
+          <p:cNvPr id="41" name="TextBox 40"/>
           <p:cNvSpPr txBox="1"/>
           <p:nvPr/>
         </p:nvSpPr>
         <p:spPr>
           <a:xfrm>
-            <a:off x="731520" y="16508221"/>
+            <a:off x="731520" y="19024346"/>
             <a:ext cx="10607040" cy="365760"/>
           </a:xfrm>
           <a:prstGeom prst="rect">
@@ -4613,20 +4781,20 @@
                 </a:solidFill>
                 <a:latin typeface="Arial"/>
               </a:rPr>
-              <a:t>A new robot needs a project, an API key and a session start. The ingest contract is the same for every vehicle: start a session, post sensor batches and frames while driving, stop. The platform does not care what the robot is. The Unitree humanoid's project exists on this basis and is waiting on its first upload.</a:t>
-            </a:r>
-          </a:p>
-        </p:txBody>
-      </p:sp>
-      <p:sp>
-        <p:nvSpPr>
-          <p:cNvPr id="38" name="TextBox 37"/>
+              <a:t>A new robot needs a project, an API key and a session start. The ingest contract is the same for every vehicle: open a session, post sensor batches and frames while driving, stop. The platform does not care what the robot is. Empty projects for a mobile robot and a humanoid already sit on it, waiting for a first upload.</a:t>
+            </a:r>
+          </a:p>
+        </p:txBody>
+      </p:sp>
+      <p:sp>
+        <p:nvSpPr>
+          <p:cNvPr id="42" name="TextBox 41"/>
           <p:cNvSpPr txBox="1"/>
           <p:nvPr/>
         </p:nvSpPr>
         <p:spPr>
           <a:xfrm>
-            <a:off x="731520" y="18174461"/>
+            <a:off x="731520" y="20690586"/>
             <a:ext cx="10607040" cy="365760"/>
           </a:xfrm>
           <a:prstGeom prst="rect">
@@ -4662,13 +4830,13 @@
       </p:sp>
       <p:sp>
         <p:nvSpPr>
-          <p:cNvPr id="39" name="Rectangle 38"/>
+          <p:cNvPr id="43" name="Rectangle 42"/>
           <p:cNvSpPr/>
           <p:nvPr/>
         </p:nvSpPr>
         <p:spPr>
           <a:xfrm>
-            <a:off x="731520" y="18702781"/>
+            <a:off x="731520" y="21218906"/>
             <a:ext cx="10607040" cy="27432"/>
           </a:xfrm>
           <a:prstGeom prst="rect">
@@ -4706,13 +4874,13 @@
       </p:sp>
       <p:sp>
         <p:nvSpPr>
-          <p:cNvPr id="40" name="TextBox 39"/>
+          <p:cNvPr id="44" name="TextBox 43"/>
           <p:cNvSpPr txBox="1"/>
           <p:nvPr/>
         </p:nvSpPr>
         <p:spPr>
           <a:xfrm>
-            <a:off x="731520" y="19031965"/>
+            <a:off x="731520" y="21548090"/>
             <a:ext cx="10607040" cy="365760"/>
           </a:xfrm>
           <a:prstGeom prst="rect">
@@ -4748,13 +4916,13 @@
       </p:sp>
       <p:sp>
         <p:nvSpPr>
-          <p:cNvPr id="41" name="TextBox 40"/>
+          <p:cNvPr id="45" name="TextBox 44"/>
           <p:cNvSpPr txBox="1"/>
           <p:nvPr/>
         </p:nvSpPr>
         <p:spPr>
           <a:xfrm>
-            <a:off x="731520" y="20698205"/>
+            <a:off x="731520" y="23214330"/>
             <a:ext cx="10607040" cy="365760"/>
           </a:xfrm>
           <a:prstGeom prst="rect">
@@ -4790,13 +4958,13 @@
       </p:sp>
       <p:sp>
         <p:nvSpPr>
-          <p:cNvPr id="42" name="Rectangle 41"/>
+          <p:cNvPr id="46" name="Rectangle 45"/>
           <p:cNvSpPr/>
           <p:nvPr/>
         </p:nvSpPr>
         <p:spPr>
           <a:xfrm>
-            <a:off x="731520" y="21226526"/>
+            <a:off x="731520" y="23742650"/>
             <a:ext cx="10607040" cy="27432"/>
           </a:xfrm>
           <a:prstGeom prst="rect">
@@ -4834,13 +5002,13 @@
       </p:sp>
       <p:sp>
         <p:nvSpPr>
-          <p:cNvPr id="43" name="TextBox 42"/>
+          <p:cNvPr id="47" name="TextBox 46"/>
           <p:cNvSpPr txBox="1"/>
           <p:nvPr/>
         </p:nvSpPr>
         <p:spPr>
           <a:xfrm>
-            <a:off x="731520" y="21555710"/>
+            <a:off x="731520" y="24071834"/>
             <a:ext cx="10607040" cy="365760"/>
           </a:xfrm>
           <a:prstGeom prst="rect">
@@ -4876,7 +5044,7 @@
       </p:sp>
       <p:sp>
         <p:nvSpPr>
-          <p:cNvPr id="44" name="TextBox 43"/>
+          <p:cNvPr id="48" name="TextBox 47"/>
           <p:cNvSpPr txBox="1"/>
           <p:nvPr/>
         </p:nvSpPr>
@@ -4918,7 +5086,7 @@
       </p:sp>
       <p:sp>
         <p:nvSpPr>
-          <p:cNvPr id="45" name="Rectangle 44"/>
+          <p:cNvPr id="49" name="Rectangle 48"/>
           <p:cNvSpPr/>
           <p:nvPr/>
         </p:nvSpPr>
@@ -4962,7 +5130,7 @@
       </p:sp>
       <p:sp>
         <p:nvSpPr>
-          <p:cNvPr id="46" name="TextBox 45"/>
+          <p:cNvPr id="50" name="TextBox 49"/>
           <p:cNvSpPr txBox="1"/>
           <p:nvPr/>
         </p:nvSpPr>
@@ -4997,14 +5165,14 @@
                 </a:solidFill>
                 <a:latin typeface="Arial"/>
               </a:rPr>
-              <a:t>Robot 241 is a tracked rover that drives crop rows and streams camera, GPS and two IMUs. The laser cart carries the weeder: a galvanometer laser, a down camera over the work zone and a forward camera. A Unitree humanoid has a project and has uploaded nothing yet. Between them the two ground vehicles have recorded 2,686 frames in 26 drives.</a:t>
-            </a:r>
-          </a:p>
-        </p:txBody>
-      </p:sp>
-      <p:sp>
-        <p:nvSpPr>
-          <p:cNvPr id="47" name="TextBox 46"/>
+              <a:t>Robot 241 is a tracked rover that drives crop rows and streams camera, GPS and two IMUs. The laser cart carries the weeder: a galvanometer laser, a down camera over the work zone and a forward camera. Ten projects sit on the platform and two of them have a robot reporting into them. Between those two vehicles, 2,686 frames in 26 drives.</a:t>
+            </a:r>
+          </a:p>
+        </p:txBody>
+      </p:sp>
+      <p:sp>
+        <p:nvSpPr>
+          <p:cNvPr id="51" name="TextBox 50"/>
           <p:cNvSpPr txBox="1"/>
           <p:nvPr/>
         </p:nvSpPr>
@@ -5046,7 +5214,7 @@
       </p:sp>
       <p:sp>
         <p:nvSpPr>
-          <p:cNvPr id="48" name="Rectangle 47"/>
+          <p:cNvPr id="52" name="Rectangle 51"/>
           <p:cNvSpPr/>
           <p:nvPr/>
         </p:nvSpPr>
@@ -5090,7 +5258,7 @@
       </p:sp>
       <p:sp>
         <p:nvSpPr>
-          <p:cNvPr id="49" name="TextBox 48"/>
+          <p:cNvPr id="53" name="TextBox 52"/>
           <p:cNvSpPr txBox="1"/>
           <p:nvPr/>
         </p:nvSpPr>
@@ -5132,7 +5300,7 @@
       </p:sp>
       <p:sp>
         <p:nvSpPr>
-          <p:cNvPr id="50" name="TextBox 49"/>
+          <p:cNvPr id="54" name="TextBox 53"/>
           <p:cNvSpPr txBox="1"/>
           <p:nvPr/>
         </p:nvSpPr>
@@ -5174,7 +5342,7 @@
       </p:sp>
       <p:sp>
         <p:nvSpPr>
-          <p:cNvPr id="51" name="Rectangle 50"/>
+          <p:cNvPr id="55" name="Rectangle 54"/>
           <p:cNvSpPr/>
           <p:nvPr/>
         </p:nvSpPr>
@@ -5218,7 +5386,7 @@
       </p:sp>
       <p:sp>
         <p:nvSpPr>
-          <p:cNvPr id="52" name="TextBox 51"/>
+          <p:cNvPr id="56" name="TextBox 55"/>
           <p:cNvSpPr txBox="1"/>
           <p:nvPr/>
         </p:nvSpPr>
@@ -5260,7 +5428,7 @@
       </p:sp>
       <p:sp>
         <p:nvSpPr>
-          <p:cNvPr id="53" name="TextBox 52"/>
+          <p:cNvPr id="57" name="TextBox 56"/>
           <p:cNvSpPr txBox="1"/>
           <p:nvPr/>
         </p:nvSpPr>
@@ -5302,7 +5470,7 @@
       </p:sp>
       <p:sp>
         <p:nvSpPr>
-          <p:cNvPr id="54" name="Rectangle 53"/>
+          <p:cNvPr id="58" name="Rectangle 57"/>
           <p:cNvSpPr/>
           <p:nvPr/>
         </p:nvSpPr>
@@ -5346,7 +5514,7 @@
       </p:sp>
       <p:sp>
         <p:nvSpPr>
-          <p:cNvPr id="55" name="TextBox 54"/>
+          <p:cNvPr id="59" name="TextBox 58"/>
           <p:cNvSpPr txBox="1"/>
           <p:nvPr/>
         </p:nvSpPr>
@@ -5388,7 +5556,7 @@
       </p:sp>
       <p:sp>
         <p:nvSpPr>
-          <p:cNvPr id="56" name="TextBox 55"/>
+          <p:cNvPr id="60" name="TextBox 59"/>
           <p:cNvSpPr txBox="1"/>
           <p:nvPr/>
         </p:nvSpPr>
@@ -5430,7 +5598,7 @@
       </p:sp>
       <p:sp>
         <p:nvSpPr>
-          <p:cNvPr id="57" name="Rectangle 56"/>
+          <p:cNvPr id="61" name="Rectangle 60"/>
           <p:cNvSpPr/>
           <p:nvPr/>
         </p:nvSpPr>
@@ -5474,7 +5642,7 @@
       </p:sp>
       <p:sp>
         <p:nvSpPr>
-          <p:cNvPr id="58" name="TextBox 57"/>
+          <p:cNvPr id="62" name="TextBox 61"/>
           <p:cNvSpPr txBox="1"/>
           <p:nvPr/>
         </p:nvSpPr>
@@ -5516,7 +5684,7 @@
       </p:sp>
       <p:sp>
         <p:nvSpPr>
-          <p:cNvPr id="59" name="TextBox 58"/>
+          <p:cNvPr id="63" name="TextBox 62"/>
           <p:cNvSpPr txBox="1"/>
           <p:nvPr/>
         </p:nvSpPr>
@@ -5545,6 +5713,90 @@
               </a:spcAft>
             </a:pPr>
             <a:r>
+              <a:rPr sz="6200" b="1">
+                <a:solidFill>
+                  <a:srgbClr val="1C6FB5"/>
+                </a:solidFill>
+                <a:latin typeface="Georgia"/>
+              </a:rPr>
+              <a:t>162</a:t>
+            </a:r>
+          </a:p>
+        </p:txBody>
+      </p:sp>
+      <p:sp>
+        <p:nvSpPr>
+          <p:cNvPr id="64" name="TextBox 63"/>
+          <p:cNvSpPr txBox="1"/>
+          <p:nvPr/>
+        </p:nvSpPr>
+        <p:spPr>
+          <a:xfrm>
+            <a:off x="11704320" y="20912582"/>
+            <a:ext cx="9989820" cy="365760"/>
+          </a:xfrm>
+          <a:prstGeom prst="rect">
+            <a:avLst/>
+          </a:prstGeom>
+          <a:noFill/>
+        </p:spPr>
+        <p:txBody>
+          <a:bodyPr wrap="square" lIns="0" rIns="0" tIns="0" bIns="0">
+            <a:spAutoFit/>
+          </a:bodyPr>
+          <a:lstStyle/>
+          <a:p>
+            <a:pPr algn="l">
+              <a:lnSpc>
+                <a:spcPct val="122000"/>
+              </a:lnSpc>
+              <a:spcAft>
+                <a:spcPts val="600"/>
+              </a:spcAft>
+            </a:pPr>
+            <a:r>
+              <a:rPr sz="1500" b="0">
+                <a:solidFill>
+                  <a:srgbClr val="6A6A6A"/>
+                </a:solidFill>
+                <a:latin typeface="Arial"/>
+              </a:rPr>
+              <a:t>real failures frozen as a benchmark</a:t>
+            </a:r>
+          </a:p>
+        </p:txBody>
+      </p:sp>
+      <p:sp>
+        <p:nvSpPr>
+          <p:cNvPr id="65" name="TextBox 64"/>
+          <p:cNvSpPr txBox="1"/>
+          <p:nvPr/>
+        </p:nvSpPr>
+        <p:spPr>
+          <a:xfrm>
+            <a:off x="11704320" y="21367495"/>
+            <a:ext cx="9989820" cy="365760"/>
+          </a:xfrm>
+          <a:prstGeom prst="rect">
+            <a:avLst/>
+          </a:prstGeom>
+          <a:noFill/>
+        </p:spPr>
+        <p:txBody>
+          <a:bodyPr wrap="square" lIns="0" rIns="0" tIns="0" bIns="0">
+            <a:spAutoFit/>
+          </a:bodyPr>
+          <a:lstStyle/>
+          <a:p>
+            <a:pPr algn="l">
+              <a:lnSpc>
+                <a:spcPct val="95000"/>
+              </a:lnSpc>
+              <a:spcAft>
+                <a:spcPts val="0"/>
+              </a:spcAft>
+            </a:pPr>
+            <a:r>
               <a:rPr sz="3200" b="1">
                 <a:solidFill>
                   <a:srgbClr val="1A1A1A"/>
@@ -5558,13 +5810,13 @@
       </p:sp>
       <p:sp>
         <p:nvSpPr>
-          <p:cNvPr id="60" name="Rectangle 59"/>
+          <p:cNvPr id="66" name="Rectangle 65"/>
           <p:cNvSpPr/>
           <p:nvPr/>
         </p:nvSpPr>
         <p:spPr>
           <a:xfrm>
-            <a:off x="11704320" y="20637754"/>
+            <a:off x="11704320" y="21895816"/>
             <a:ext cx="9989820" cy="27432"/>
           </a:xfrm>
           <a:prstGeom prst="rect">
@@ -5602,13 +5854,13 @@
       </p:sp>
       <p:sp>
         <p:nvSpPr>
-          <p:cNvPr id="61" name="TextBox 60"/>
+          <p:cNvPr id="67" name="TextBox 66"/>
           <p:cNvSpPr txBox="1"/>
           <p:nvPr/>
         </p:nvSpPr>
         <p:spPr>
           <a:xfrm>
-            <a:off x="11704320" y="20966938"/>
+            <a:off x="11704320" y="22225000"/>
             <a:ext cx="9989820" cy="365760"/>
           </a:xfrm>
           <a:prstGeom prst="rect">
@@ -5644,7 +5896,7 @@
       </p:sp>
       <p:sp>
         <p:nvSpPr>
-          <p:cNvPr id="62" name="TextBox 61"/>
+          <p:cNvPr id="68" name="TextBox 67"/>
           <p:cNvSpPr txBox="1"/>
           <p:nvPr/>
         </p:nvSpPr>
@@ -5686,7 +5938,7 @@
       </p:sp>
       <p:sp>
         <p:nvSpPr>
-          <p:cNvPr id="63" name="Rectangle 62"/>
+          <p:cNvPr id="69" name="Rectangle 68"/>
           <p:cNvSpPr/>
           <p:nvPr/>
         </p:nvSpPr>
@@ -5730,7 +5982,7 @@
       </p:sp>
       <p:sp>
         <p:nvSpPr>
-          <p:cNvPr id="64" name="TextBox 63"/>
+          <p:cNvPr id="70" name="TextBox 69"/>
           <p:cNvSpPr txBox="1"/>
           <p:nvPr/>
         </p:nvSpPr>
@@ -5772,7 +6024,7 @@
       </p:sp>
       <p:sp>
         <p:nvSpPr>
-          <p:cNvPr id="65" name="TextBox 64"/>
+          <p:cNvPr id="71" name="TextBox 70"/>
           <p:cNvSpPr txBox="1"/>
           <p:nvPr/>
         </p:nvSpPr>
@@ -5814,7 +6066,7 @@
       </p:sp>
       <p:sp>
         <p:nvSpPr>
-          <p:cNvPr id="66" name="Rectangle 65"/>
+          <p:cNvPr id="72" name="Rectangle 71"/>
           <p:cNvSpPr/>
           <p:nvPr/>
         </p:nvSpPr>
@@ -5858,7 +6110,7 @@
       </p:sp>
       <p:sp>
         <p:nvSpPr>
-          <p:cNvPr id="67" name="TextBox 66"/>
+          <p:cNvPr id="73" name="TextBox 72"/>
           <p:cNvSpPr txBox="1"/>
           <p:nvPr/>
         </p:nvSpPr>
@@ -5900,7 +6152,7 @@
       </p:sp>
       <p:sp>
         <p:nvSpPr>
-          <p:cNvPr id="68" name="TextBox 67"/>
+          <p:cNvPr id="74" name="TextBox 73"/>
           <p:cNvSpPr txBox="1"/>
           <p:nvPr/>
         </p:nvSpPr>
@@ -5942,7 +6194,7 @@
       </p:sp>
       <p:sp>
         <p:nvSpPr>
-          <p:cNvPr id="69" name="Rectangle 68"/>
+          <p:cNvPr id="75" name="Rectangle 74"/>
           <p:cNvSpPr/>
           <p:nvPr/>
         </p:nvSpPr>
@@ -5986,7 +6238,7 @@
       </p:sp>
       <p:sp>
         <p:nvSpPr>
-          <p:cNvPr id="70" name="TextBox 69"/>
+          <p:cNvPr id="76" name="TextBox 75"/>
           <p:cNvSpPr txBox="1"/>
           <p:nvPr/>
         </p:nvSpPr>
@@ -6028,7 +6280,7 @@
       </p:sp>
       <p:sp>
         <p:nvSpPr>
-          <p:cNvPr id="71" name="TextBox 70"/>
+          <p:cNvPr id="77" name="TextBox 76"/>
           <p:cNvSpPr txBox="1"/>
           <p:nvPr/>
         </p:nvSpPr>
@@ -6070,7 +6322,7 @@
       </p:sp>
       <p:sp>
         <p:nvSpPr>
-          <p:cNvPr id="72" name="Rectangle 71"/>
+          <p:cNvPr id="78" name="Rectangle 77"/>
           <p:cNvSpPr/>
           <p:nvPr/>
         </p:nvSpPr>
@@ -6114,7 +6366,7 @@
       </p:sp>
       <p:sp>
         <p:nvSpPr>
-          <p:cNvPr id="73" name="TextBox 72"/>
+          <p:cNvPr id="79" name="TextBox 78"/>
           <p:cNvSpPr txBox="1"/>
           <p:nvPr/>
         </p:nvSpPr>
@@ -6156,7 +6408,7 @@
       </p:sp>
       <p:sp>
         <p:nvSpPr>
-          <p:cNvPr id="74" name="TextBox 73"/>
+          <p:cNvPr id="80" name="TextBox 79"/>
           <p:cNvSpPr txBox="1"/>
           <p:nvPr/>
         </p:nvSpPr>
@@ -6185,6 +6437,90 @@
               </a:spcAft>
             </a:pPr>
             <a:r>
+              <a:rPr sz="6200" b="1">
+                <a:solidFill>
+                  <a:srgbClr val="1C6FB5"/>
+                </a:solidFill>
+                <a:latin typeface="Georgia"/>
+              </a:rPr>
+              <a:t>26</a:t>
+            </a:r>
+          </a:p>
+        </p:txBody>
+      </p:sp>
+      <p:sp>
+        <p:nvSpPr>
+          <p:cNvPr id="81" name="TextBox 80"/>
+          <p:cNvSpPr txBox="1"/>
+          <p:nvPr/>
+        </p:nvSpPr>
+        <p:spPr>
+          <a:xfrm>
+            <a:off x="22059900" y="18388837"/>
+            <a:ext cx="9989820" cy="365760"/>
+          </a:xfrm>
+          <a:prstGeom prst="rect">
+            <a:avLst/>
+          </a:prstGeom>
+          <a:noFill/>
+        </p:spPr>
+        <p:txBody>
+          <a:bodyPr wrap="square" lIns="0" rIns="0" tIns="0" bIns="0">
+            <a:spAutoFit/>
+          </a:bodyPr>
+          <a:lstStyle/>
+          <a:p>
+            <a:pPr algn="l">
+              <a:lnSpc>
+                <a:spcPct val="122000"/>
+              </a:lnSpc>
+              <a:spcAft>
+                <a:spcPts val="600"/>
+              </a:spcAft>
+            </a:pPr>
+            <a:r>
+              <a:rPr sz="1500" b="0">
+                <a:solidFill>
+                  <a:srgbClr val="6A6A6A"/>
+                </a:solidFill>
+                <a:latin typeface="Arial"/>
+              </a:rPr>
+              <a:t>live drives diagnosed without being asked</a:t>
+            </a:r>
+          </a:p>
+        </p:txBody>
+      </p:sp>
+      <p:sp>
+        <p:nvSpPr>
+          <p:cNvPr id="82" name="TextBox 81"/>
+          <p:cNvSpPr txBox="1"/>
+          <p:nvPr/>
+        </p:nvSpPr>
+        <p:spPr>
+          <a:xfrm>
+            <a:off x="22059900" y="18843751"/>
+            <a:ext cx="9989820" cy="365760"/>
+          </a:xfrm>
+          <a:prstGeom prst="rect">
+            <a:avLst/>
+          </a:prstGeom>
+          <a:noFill/>
+        </p:spPr>
+        <p:txBody>
+          <a:bodyPr wrap="square" lIns="0" rIns="0" tIns="0" bIns="0">
+            <a:spAutoFit/>
+          </a:bodyPr>
+          <a:lstStyle/>
+          <a:p>
+            <a:pPr algn="l">
+              <a:lnSpc>
+                <a:spcPct val="95000"/>
+              </a:lnSpc>
+              <a:spcAft>
+                <a:spcPts val="0"/>
+              </a:spcAft>
+            </a:pPr>
+            <a:r>
               <a:rPr sz="3200" b="1">
                 <a:solidFill>
                   <a:srgbClr val="1A1A1A"/>
@@ -6198,13 +6534,13 @@
       </p:sp>
       <p:sp>
         <p:nvSpPr>
-          <p:cNvPr id="75" name="Rectangle 74"/>
+          <p:cNvPr id="83" name="Rectangle 82"/>
           <p:cNvSpPr/>
           <p:nvPr/>
         </p:nvSpPr>
         <p:spPr>
           <a:xfrm>
-            <a:off x="22059900" y="18114009"/>
+            <a:off x="22059900" y="19372071"/>
             <a:ext cx="9989820" cy="27432"/>
           </a:xfrm>
           <a:prstGeom prst="rect">
@@ -6242,13 +6578,13 @@
       </p:sp>
       <p:sp>
         <p:nvSpPr>
-          <p:cNvPr id="76" name="TextBox 75"/>
+          <p:cNvPr id="84" name="TextBox 83"/>
           <p:cNvSpPr txBox="1"/>
           <p:nvPr/>
         </p:nvSpPr>
         <p:spPr>
           <a:xfrm>
-            <a:off x="22059900" y="18443193"/>
+            <a:off x="22059900" y="19701255"/>
             <a:ext cx="9989820" cy="365760"/>
           </a:xfrm>
           <a:prstGeom prst="rect">
@@ -6284,13 +6620,13 @@
       </p:sp>
       <p:sp>
         <p:nvSpPr>
-          <p:cNvPr id="77" name="TextBox 76"/>
+          <p:cNvPr id="85" name="TextBox 84"/>
           <p:cNvSpPr txBox="1"/>
           <p:nvPr/>
         </p:nvSpPr>
         <p:spPr>
           <a:xfrm>
-            <a:off x="22059900" y="20109433"/>
+            <a:off x="22059900" y="21367495"/>
             <a:ext cx="9989820" cy="365760"/>
           </a:xfrm>
           <a:prstGeom prst="rect">
@@ -6326,13 +6662,13 @@
       </p:sp>
       <p:sp>
         <p:nvSpPr>
-          <p:cNvPr id="78" name="Rectangle 77"/>
+          <p:cNvPr id="86" name="Rectangle 85"/>
           <p:cNvSpPr/>
           <p:nvPr/>
         </p:nvSpPr>
         <p:spPr>
           <a:xfrm>
-            <a:off x="22059900" y="20637754"/>
+            <a:off x="22059900" y="21895816"/>
             <a:ext cx="9989820" cy="27432"/>
           </a:xfrm>
           <a:prstGeom prst="rect">
@@ -6370,13 +6706,13 @@
       </p:sp>
       <p:sp>
         <p:nvSpPr>
-          <p:cNvPr id="79" name="TextBox 78"/>
+          <p:cNvPr id="87" name="TextBox 86"/>
           <p:cNvSpPr txBox="1"/>
           <p:nvPr/>
         </p:nvSpPr>
         <p:spPr>
           <a:xfrm>
-            <a:off x="22059900" y="20966938"/>
+            <a:off x="22059900" y="22225000"/>
             <a:ext cx="9989820" cy="365760"/>
           </a:xfrm>
           <a:prstGeom prst="rect">
@@ -6412,7 +6748,7 @@
       </p:sp>
       <p:sp>
         <p:nvSpPr>
-          <p:cNvPr id="80" name="TextBox 79"/>
+          <p:cNvPr id="88" name="TextBox 87"/>
           <p:cNvSpPr txBox="1"/>
           <p:nvPr/>
         </p:nvSpPr>
@@ -6441,6 +6777,90 @@
               </a:spcAft>
             </a:pPr>
             <a:r>
+              <a:rPr sz="6200" b="1">
+                <a:solidFill>
+                  <a:srgbClr val="1C6FB5"/>
+                </a:solidFill>
+                <a:latin typeface="Georgia"/>
+              </a:rPr>
+              <a:t>1,389</a:t>
+            </a:r>
+          </a:p>
+        </p:txBody>
+      </p:sp>
+      <p:sp>
+        <p:nvSpPr>
+          <p:cNvPr id="89" name="TextBox 88"/>
+          <p:cNvSpPr txBox="1"/>
+          <p:nvPr/>
+        </p:nvSpPr>
+        <p:spPr>
+          <a:xfrm>
+            <a:off x="32552640" y="8588248"/>
+            <a:ext cx="10607040" cy="365760"/>
+          </a:xfrm>
+          <a:prstGeom prst="rect">
+            <a:avLst/>
+          </a:prstGeom>
+          <a:noFill/>
+        </p:spPr>
+        <p:txBody>
+          <a:bodyPr wrap="square" lIns="0" rIns="0" tIns="0" bIns="0">
+            <a:spAutoFit/>
+          </a:bodyPr>
+          <a:lstStyle/>
+          <a:p>
+            <a:pPr algn="l">
+              <a:lnSpc>
+                <a:spcPct val="122000"/>
+              </a:lnSpc>
+              <a:spcAft>
+                <a:spcPts val="600"/>
+              </a:spcAft>
+            </a:pPr>
+            <a:r>
+              <a:rPr sz="1500" b="0">
+                <a:solidFill>
+                  <a:srgbClr val="6A6A6A"/>
+                </a:solidFill>
+                <a:latin typeface="Arial"/>
+              </a:rPr>
+              <a:t>joystick commands through the platform</a:t>
+            </a:r>
+          </a:p>
+        </p:txBody>
+      </p:sp>
+      <p:sp>
+        <p:nvSpPr>
+          <p:cNvPr id="90" name="TextBox 89"/>
+          <p:cNvSpPr txBox="1"/>
+          <p:nvPr/>
+        </p:nvSpPr>
+        <p:spPr>
+          <a:xfrm>
+            <a:off x="32552640" y="9043162"/>
+            <a:ext cx="10607040" cy="365760"/>
+          </a:xfrm>
+          <a:prstGeom prst="rect">
+            <a:avLst/>
+          </a:prstGeom>
+          <a:noFill/>
+        </p:spPr>
+        <p:txBody>
+          <a:bodyPr wrap="square" lIns="0" rIns="0" tIns="0" bIns="0">
+            <a:spAutoFit/>
+          </a:bodyPr>
+          <a:lstStyle/>
+          <a:p>
+            <a:pPr algn="l">
+              <a:lnSpc>
+                <a:spcPct val="95000"/>
+              </a:lnSpc>
+              <a:spcAft>
+                <a:spcPts val="0"/>
+              </a:spcAft>
+            </a:pPr>
+            <a:r>
               <a:rPr sz="3200" b="1">
                 <a:solidFill>
                   <a:srgbClr val="1A1A1A"/>
@@ -6454,13 +6874,13 @@
       </p:sp>
       <p:sp>
         <p:nvSpPr>
-          <p:cNvPr id="81" name="Rectangle 80"/>
+          <p:cNvPr id="91" name="Rectangle 90"/>
           <p:cNvSpPr/>
           <p:nvPr/>
         </p:nvSpPr>
         <p:spPr>
           <a:xfrm>
-            <a:off x="32552640" y="8313419"/>
+            <a:off x="32552640" y="9571482"/>
             <a:ext cx="10607040" cy="27432"/>
           </a:xfrm>
           <a:prstGeom prst="rect">
@@ -6498,13 +6918,13 @@
       </p:sp>
       <p:sp>
         <p:nvSpPr>
-          <p:cNvPr id="82" name="TextBox 81"/>
+          <p:cNvPr id="92" name="TextBox 91"/>
           <p:cNvSpPr txBox="1"/>
           <p:nvPr/>
         </p:nvSpPr>
         <p:spPr>
           <a:xfrm>
-            <a:off x="32552640" y="8642603"/>
+            <a:off x="32552640" y="9900665"/>
             <a:ext cx="10607040" cy="365760"/>
           </a:xfrm>
           <a:prstGeom prst="rect">
@@ -6540,13 +6960,13 @@
       </p:sp>
       <p:sp>
         <p:nvSpPr>
-          <p:cNvPr id="83" name="TextBox 82"/>
+          <p:cNvPr id="93" name="TextBox 92"/>
           <p:cNvSpPr txBox="1"/>
           <p:nvPr/>
         </p:nvSpPr>
         <p:spPr>
           <a:xfrm>
-            <a:off x="32552640" y="10308843"/>
+            <a:off x="32552640" y="11566905"/>
             <a:ext cx="10607040" cy="365760"/>
           </a:xfrm>
           <a:prstGeom prst="rect">
@@ -6582,13 +7002,13 @@
       </p:sp>
       <p:sp>
         <p:nvSpPr>
-          <p:cNvPr id="84" name="Rectangle 83"/>
+          <p:cNvPr id="94" name="Rectangle 93"/>
           <p:cNvSpPr/>
           <p:nvPr/>
         </p:nvSpPr>
         <p:spPr>
           <a:xfrm>
-            <a:off x="32552640" y="10837163"/>
+            <a:off x="32552640" y="12095225"/>
             <a:ext cx="10607040" cy="27432"/>
           </a:xfrm>
           <a:prstGeom prst="rect">
@@ -6626,13 +7046,13 @@
       </p:sp>
       <p:sp>
         <p:nvSpPr>
-          <p:cNvPr id="85" name="TextBox 84"/>
+          <p:cNvPr id="95" name="TextBox 94"/>
           <p:cNvSpPr txBox="1"/>
           <p:nvPr/>
         </p:nvSpPr>
         <p:spPr>
           <a:xfrm>
-            <a:off x="32552640" y="11166347"/>
+            <a:off x="32552640" y="12424409"/>
             <a:ext cx="10607040" cy="365760"/>
           </a:xfrm>
           <a:prstGeom prst="rect">
@@ -6668,13 +7088,13 @@
       </p:sp>
       <p:sp>
         <p:nvSpPr>
-          <p:cNvPr id="86" name="TextBox 85"/>
+          <p:cNvPr id="96" name="TextBox 95"/>
           <p:cNvSpPr txBox="1"/>
           <p:nvPr/>
         </p:nvSpPr>
         <p:spPr>
           <a:xfrm>
-            <a:off x="32552640" y="12832587"/>
+            <a:off x="32552640" y="14090649"/>
             <a:ext cx="10607040" cy="365760"/>
           </a:xfrm>
           <a:prstGeom prst="rect">
@@ -6710,13 +7130,13 @@
       </p:sp>
       <p:sp>
         <p:nvSpPr>
-          <p:cNvPr id="87" name="Rectangle 86"/>
+          <p:cNvPr id="97" name="Rectangle 96"/>
           <p:cNvSpPr/>
           <p:nvPr/>
         </p:nvSpPr>
         <p:spPr>
           <a:xfrm>
-            <a:off x="32552640" y="13360907"/>
+            <a:off x="32552640" y="14618969"/>
             <a:ext cx="10607040" cy="27432"/>
           </a:xfrm>
           <a:prstGeom prst="rect">
@@ -6754,13 +7174,13 @@
       </p:sp>
       <p:sp>
         <p:nvSpPr>
-          <p:cNvPr id="88" name="TextBox 87"/>
+          <p:cNvPr id="98" name="TextBox 97"/>
           <p:cNvSpPr txBox="1"/>
           <p:nvPr/>
         </p:nvSpPr>
         <p:spPr>
           <a:xfrm>
-            <a:off x="32552640" y="13690091"/>
+            <a:off x="32552640" y="14948153"/>
             <a:ext cx="10607040" cy="365760"/>
           </a:xfrm>
           <a:prstGeom prst="rect">
@@ -6796,13 +7216,13 @@
       </p:sp>
       <p:sp>
         <p:nvSpPr>
-          <p:cNvPr id="89" name="TextBox 88"/>
+          <p:cNvPr id="99" name="TextBox 98"/>
           <p:cNvSpPr txBox="1"/>
           <p:nvPr/>
         </p:nvSpPr>
         <p:spPr>
           <a:xfrm>
-            <a:off x="32552640" y="15356331"/>
+            <a:off x="32552640" y="16614393"/>
             <a:ext cx="10607040" cy="365760"/>
           </a:xfrm>
           <a:prstGeom prst="rect">
@@ -6838,13 +7258,13 @@
       </p:sp>
       <p:sp>
         <p:nvSpPr>
-          <p:cNvPr id="90" name="Rectangle 89"/>
+          <p:cNvPr id="100" name="Rectangle 99"/>
           <p:cNvSpPr/>
           <p:nvPr/>
         </p:nvSpPr>
         <p:spPr>
           <a:xfrm>
-            <a:off x="32552640" y="15884651"/>
+            <a:off x="32552640" y="17142714"/>
             <a:ext cx="10607040" cy="27432"/>
           </a:xfrm>
           <a:prstGeom prst="rect">
@@ -6882,13 +7302,13 @@
       </p:sp>
       <p:sp>
         <p:nvSpPr>
-          <p:cNvPr id="91" name="TextBox 90"/>
+          <p:cNvPr id="101" name="TextBox 100"/>
           <p:cNvSpPr txBox="1"/>
           <p:nvPr/>
         </p:nvSpPr>
         <p:spPr>
           <a:xfrm>
-            <a:off x="32552640" y="16213835"/>
+            <a:off x="32552640" y="17471898"/>
             <a:ext cx="10607040" cy="365760"/>
           </a:xfrm>
           <a:prstGeom prst="rect">
@@ -6924,13 +7344,13 @@
       </p:sp>
       <p:sp>
         <p:nvSpPr>
-          <p:cNvPr id="92" name="TextBox 91"/>
+          <p:cNvPr id="102" name="TextBox 101"/>
           <p:cNvSpPr txBox="1"/>
           <p:nvPr/>
         </p:nvSpPr>
         <p:spPr>
           <a:xfrm>
-            <a:off x="32552640" y="17585689"/>
+            <a:off x="32552640" y="18843752"/>
             <a:ext cx="10607040" cy="365760"/>
           </a:xfrm>
           <a:prstGeom prst="rect">
@@ -6953,6 +7373,90 @@
               </a:spcAft>
             </a:pPr>
             <a:r>
+              <a:rPr sz="6200" b="1">
+                <a:solidFill>
+                  <a:srgbClr val="1C6FB5"/>
+                </a:solidFill>
+                <a:latin typeface="Georgia"/>
+              </a:rPr>
+              <a:t>0</a:t>
+            </a:r>
+          </a:p>
+        </p:txBody>
+      </p:sp>
+      <p:sp>
+        <p:nvSpPr>
+          <p:cNvPr id="103" name="TextBox 102"/>
+          <p:cNvSpPr txBox="1"/>
+          <p:nvPr/>
+        </p:nvSpPr>
+        <p:spPr>
+          <a:xfrm>
+            <a:off x="32552640" y="19646900"/>
+            <a:ext cx="10607040" cy="365760"/>
+          </a:xfrm>
+          <a:prstGeom prst="rect">
+            <a:avLst/>
+          </a:prstGeom>
+          <a:noFill/>
+        </p:spPr>
+        <p:txBody>
+          <a:bodyPr wrap="square" lIns="0" rIns="0" tIns="0" bIns="0">
+            <a:spAutoFit/>
+          </a:bodyPr>
+          <a:lstStyle/>
+          <a:p>
+            <a:pPr algn="l">
+              <a:lnSpc>
+                <a:spcPct val="122000"/>
+              </a:lnSpc>
+              <a:spcAft>
+                <a:spcPts val="600"/>
+              </a:spcAft>
+            </a:pPr>
+            <a:r>
+              <a:rPr sz="1500" b="0">
+                <a:solidFill>
+                  <a:srgbClr val="6A6A6A"/>
+                </a:solidFill>
+                <a:latin typeface="Arial"/>
+              </a:rPr>
+              <a:t>times the laser has been fired by the platform</a:t>
+            </a:r>
+          </a:p>
+        </p:txBody>
+      </p:sp>
+      <p:sp>
+        <p:nvSpPr>
+          <p:cNvPr id="104" name="TextBox 103"/>
+          <p:cNvSpPr txBox="1"/>
+          <p:nvPr/>
+        </p:nvSpPr>
+        <p:spPr>
+          <a:xfrm>
+            <a:off x="32552640" y="20101814"/>
+            <a:ext cx="10607040" cy="365760"/>
+          </a:xfrm>
+          <a:prstGeom prst="rect">
+            <a:avLst/>
+          </a:prstGeom>
+          <a:noFill/>
+        </p:spPr>
+        <p:txBody>
+          <a:bodyPr wrap="square" lIns="0" rIns="0" tIns="0" bIns="0">
+            <a:spAutoFit/>
+          </a:bodyPr>
+          <a:lstStyle/>
+          <a:p>
+            <a:pPr algn="l">
+              <a:lnSpc>
+                <a:spcPct val="95000"/>
+              </a:lnSpc>
+              <a:spcAft>
+                <a:spcPts val="0"/>
+              </a:spcAft>
+            </a:pPr>
+            <a:r>
               <a:rPr sz="3200" b="1">
                 <a:solidFill>
                   <a:srgbClr val="1A1A1A"/>
@@ -6966,13 +7470,13 @@
       </p:sp>
       <p:sp>
         <p:nvSpPr>
-          <p:cNvPr id="93" name="Rectangle 92"/>
+          <p:cNvPr id="105" name="Rectangle 104"/>
           <p:cNvSpPr/>
           <p:nvPr/>
         </p:nvSpPr>
         <p:spPr>
           <a:xfrm>
-            <a:off x="32552640" y="18114009"/>
+            <a:off x="32552640" y="20630134"/>
             <a:ext cx="10607040" cy="27432"/>
           </a:xfrm>
           <a:prstGeom prst="rect">
@@ -7010,13 +7514,13 @@
       </p:sp>
       <p:sp>
         <p:nvSpPr>
-          <p:cNvPr id="94" name="TextBox 93"/>
+          <p:cNvPr id="106" name="TextBox 105"/>
           <p:cNvSpPr txBox="1"/>
           <p:nvPr/>
         </p:nvSpPr>
         <p:spPr>
           <a:xfrm>
-            <a:off x="32552640" y="18443193"/>
+            <a:off x="32552640" y="20959318"/>
             <a:ext cx="10607040" cy="365760"/>
           </a:xfrm>
           <a:prstGeom prst="rect">
@@ -7052,7 +7556,7 @@
       </p:sp>
       <p:sp>
         <p:nvSpPr>
-          <p:cNvPr id="95" name="Rectangle 94"/>
+          <p:cNvPr id="107" name="Rectangle 106"/>
           <p:cNvSpPr/>
           <p:nvPr/>
         </p:nvSpPr>
@@ -7096,7 +7600,7 @@
       </p:sp>
       <p:sp>
         <p:nvSpPr>
-          <p:cNvPr id="96" name="TextBox 95"/>
+          <p:cNvPr id="108" name="TextBox 107"/>
           <p:cNvSpPr txBox="1"/>
           <p:nvPr/>
         </p:nvSpPr>
@@ -7138,7 +7642,7 @@
       </p:sp>
       <p:sp>
         <p:nvSpPr>
-          <p:cNvPr id="97" name="TextBox 96"/>
+          <p:cNvPr id="109" name="TextBox 108"/>
           <p:cNvSpPr txBox="1"/>
           <p:nvPr/>
         </p:nvSpPr>
@@ -7180,7 +7684,7 @@
       </p:sp>
       <p:sp>
         <p:nvSpPr>
-          <p:cNvPr id="98" name="TextBox 97"/>
+          <p:cNvPr id="110" name="TextBox 109"/>
           <p:cNvSpPr txBox="1"/>
           <p:nvPr/>
         </p:nvSpPr>
